--- a/inflation.pptx
+++ b/inflation.pptx
@@ -5737,7 +5737,7 @@
               <a:rPr>
                 <a:hlinkClick r:id="rId2"/>
               </a:rPr>
-              <a:t>https://www.youtube-nocookie.com/watch?v=g6-lciEvkpA</a:t>
+              <a:t>https://www.youtube.com/watch?v=g6-lciEvkpA</a:t>
             </a:r>
           </a:p>
         </p:txBody>
